--- a/presentations/algoritm/algoritm-predictive-maintenance-Swiss.pptx
+++ b/presentations/algoritm/algoritm-predictive-maintenance-Swiss.pptx
@@ -6273,19 +6273,17 @@
         </p:nvSpPr>
         <p:spPr>
           <a:xfrm>
-            <a:off x="868680" y="3063240"/>
-            <a:ext cx="4846320" cy="1051560"/>
+            <a:off x="868680" y="3017520"/>
+            <a:ext cx="4846320" cy="1097280"/>
           </a:xfrm>
           <a:prstGeom prst="rect">
             <a:avLst/>
           </a:prstGeom>
           <a:solidFill>
-            <a:srgbClr val="F6E3E1"/>
+            <a:srgbClr val="F1EFEE"/>
           </a:solidFill>
-          <a:ln w="9525">
-            <a:solidFill>
-              <a:srgbClr val="B72E26"/>
-            </a:solidFill>
+          <a:ln>
+            <a:noFill/>
           </a:ln>
           <a:effectLst/>
         </p:spPr>
@@ -6304,111 +6302,136 @@
           </a:fontRef>
         </p:style>
         <p:txBody>
-          <a:bodyPr rtlCol="0" anchor="ctr" wrap="square" lIns="137160" rIns="137160"/>
-          <a:lstStyle/>
-          <a:p>
-            <a:pPr algn="ctr">
-              <a:lnSpc>
-                <a:spcPct val="120000"/>
-              </a:lnSpc>
-              <a:spcBef>
-                <a:spcPts val="0"/>
-              </a:spcBef>
-              <a:spcAft>
-                <a:spcPts val="0"/>
-              </a:spcAft>
-            </a:pPr>
-            <a:r>
-              <a:rPr sz="1050" b="1">
-                <a:solidFill>
-                  <a:srgbClr val="8C1B13"/>
-                </a:solidFill>
-                <a:latin typeface="DM Sans"/>
-              </a:rPr>
-              <a:t>Схема из исходной презентации (слайды 12–14).</a:t>
-            </a:r>
-          </a:p>
-          <a:p>
-            <a:pPr algn="ctr">
-              <a:lnSpc>
-                <a:spcPct val="120000"/>
-              </a:lnSpc>
-              <a:spcBef>
-                <a:spcPts val="0"/>
-              </a:spcBef>
-              <a:spcAft>
-                <a:spcPts val="0"/>
-              </a:spcAft>
-            </a:pPr>
-            <a:r>
-              <a:rPr sz="1050" b="1">
-                <a:solidFill>
-                  <a:srgbClr val="8C1B13"/>
-                </a:solidFill>
-                <a:latin typeface="DM Sans"/>
-              </a:rPr>
-              <a:t>Логотипы завода-изготовителя на корпусах приборов удаляются.</a:t>
-            </a:r>
-          </a:p>
-        </p:txBody>
-      </p:sp>
-      <p:sp>
-        <p:nvSpPr>
-          <p:cNvPr id="11" name="TextBox 10"/>
-          <p:cNvSpPr txBox="1"/>
-          <p:nvPr/>
-        </p:nvSpPr>
-        <p:spPr>
-          <a:xfrm>
-            <a:off x="868680" y="4297680"/>
-            <a:ext cx="4846320" cy="640080"/>
-          </a:xfrm>
-          <a:prstGeom prst="rect">
-            <a:avLst/>
-          </a:prstGeom>
-          <a:noFill/>
-        </p:spPr>
-        <p:txBody>
-          <a:bodyPr wrap="square" anchor="t" lIns="0" rIns="0" tIns="0" bIns="0">
-            <a:spAutoFit/>
-          </a:bodyPr>
-          <a:lstStyle/>
-          <a:p>
-            <a:pPr algn="l">
-              <a:lnSpc>
-                <a:spcPct val="130000"/>
-              </a:lnSpc>
-              <a:spcBef>
-                <a:spcPts val="0"/>
-              </a:spcBef>
-              <a:spcAft>
-                <a:spcPts val="0"/>
-              </a:spcAft>
-            </a:pPr>
-            <a:r>
-              <a:rPr sz="1250" b="0">
-                <a:solidFill>
-                  <a:srgbClr val="5A5757"/>
-                </a:solidFill>
-                <a:latin typeface="DM Sans"/>
-              </a:rPr>
-              <a:t>Развёртывание без прокладки кабельных трасс — для распределённого и труднодоступного оборудования.</a:t>
-            </a:r>
-          </a:p>
-        </p:txBody>
-      </p:sp>
-      <p:sp>
-        <p:nvSpPr>
-          <p:cNvPr id="12" name="Rectangle 11"/>
+          <a:bodyPr rtlCol="0" anchor="ctr"/>
+          <a:lstStyle/>
+          <a:p>
+            <a:pPr algn="ctr"/>
+          </a:p>
+        </p:txBody>
+      </p:sp>
+      <p:cxnSp>
+        <p:nvCxnSpPr>
+          <p:cNvPr id="11" name="Connector 10"/>
+          <p:cNvCxnSpPr/>
+          <p:nvPr/>
+        </p:nvCxnSpPr>
+        <p:spPr>
+          <a:xfrm>
+            <a:off x="1193292" y="3291840"/>
+            <a:ext cx="589788" cy="274320"/>
+          </a:xfrm>
+          <a:prstGeom prst="line">
+            <a:avLst/>
+          </a:prstGeom>
+          <a:ln w="13970">
+            <a:solidFill>
+              <a:srgbClr val="B72E26"/>
+            </a:solidFill>
+            <a:prstDash val="dash"/>
+          </a:ln>
+          <a:effectLst/>
+        </p:spPr>
+        <p:style>
+          <a:lnRef idx="2">
+            <a:schemeClr val="accent1"/>
+          </a:lnRef>
+          <a:fillRef idx="0">
+            <a:schemeClr val="accent1"/>
+          </a:fillRef>
+          <a:effectRef idx="1">
+            <a:schemeClr val="accent1"/>
+          </a:effectRef>
+          <a:fontRef idx="minor">
+            <a:schemeClr val="tx1"/>
+          </a:fontRef>
+        </p:style>
+      </p:cxnSp>
+      <p:cxnSp>
+        <p:nvCxnSpPr>
+          <p:cNvPr id="12" name="Connector 11"/>
+          <p:cNvCxnSpPr/>
+          <p:nvPr/>
+        </p:nvCxnSpPr>
+        <p:spPr>
+          <a:xfrm>
+            <a:off x="1193292" y="3566160"/>
+            <a:ext cx="589788" cy="0"/>
+          </a:xfrm>
+          <a:prstGeom prst="line">
+            <a:avLst/>
+          </a:prstGeom>
+          <a:ln w="13970">
+            <a:solidFill>
+              <a:srgbClr val="B72E26"/>
+            </a:solidFill>
+            <a:prstDash val="dash"/>
+          </a:ln>
+          <a:effectLst/>
+        </p:spPr>
+        <p:style>
+          <a:lnRef idx="2">
+            <a:schemeClr val="accent1"/>
+          </a:lnRef>
+          <a:fillRef idx="0">
+            <a:schemeClr val="accent1"/>
+          </a:fillRef>
+          <a:effectRef idx="1">
+            <a:schemeClr val="accent1"/>
+          </a:effectRef>
+          <a:fontRef idx="minor">
+            <a:schemeClr val="tx1"/>
+          </a:fontRef>
+        </p:style>
+      </p:cxnSp>
+      <p:cxnSp>
+        <p:nvCxnSpPr>
+          <p:cNvPr id="13" name="Connector 12"/>
+          <p:cNvCxnSpPr/>
+          <p:nvPr/>
+        </p:nvCxnSpPr>
+        <p:spPr>
+          <a:xfrm flipV="1">
+            <a:off x="1193292" y="3566160"/>
+            <a:ext cx="589788" cy="274320"/>
+          </a:xfrm>
+          <a:prstGeom prst="line">
+            <a:avLst/>
+          </a:prstGeom>
+          <a:ln w="13970">
+            <a:solidFill>
+              <a:srgbClr val="B72E26"/>
+            </a:solidFill>
+            <a:prstDash val="dash"/>
+          </a:ln>
+          <a:effectLst/>
+        </p:spPr>
+        <p:style>
+          <a:lnRef idx="2">
+            <a:schemeClr val="accent1"/>
+          </a:lnRef>
+          <a:fillRef idx="0">
+            <a:schemeClr val="accent1"/>
+          </a:fillRef>
+          <a:effectRef idx="1">
+            <a:schemeClr val="accent1"/>
+          </a:effectRef>
+          <a:fontRef idx="minor">
+            <a:schemeClr val="tx1"/>
+          </a:fontRef>
+        </p:style>
+      </p:cxnSp>
+      <p:sp>
+        <p:nvSpPr>
+          <p:cNvPr id="14" name="Oval 13"/>
           <p:cNvSpPr/>
           <p:nvPr/>
         </p:nvSpPr>
         <p:spPr>
           <a:xfrm>
-            <a:off x="6172200" y="1965960"/>
-            <a:ext cx="5486400" cy="41148"/>
-          </a:xfrm>
-          <a:prstGeom prst="rect">
+            <a:off x="1124712" y="3223260"/>
+            <a:ext cx="137160" cy="137160"/>
+          </a:xfrm>
+          <a:prstGeom prst="ellipse">
             <a:avLst/>
           </a:prstGeom>
           <a:solidFill>
@@ -6443,7 +6466,552 @@
       </p:sp>
       <p:sp>
         <p:nvSpPr>
-          <p:cNvPr id="13" name="Rectangle 12"/>
+          <p:cNvPr id="15" name="Oval 14"/>
+          <p:cNvSpPr/>
+          <p:nvPr/>
+        </p:nvSpPr>
+        <p:spPr>
+          <a:xfrm>
+            <a:off x="1124712" y="3497580"/>
+            <a:ext cx="137160" cy="137160"/>
+          </a:xfrm>
+          <a:prstGeom prst="ellipse">
+            <a:avLst/>
+          </a:prstGeom>
+          <a:solidFill>
+            <a:srgbClr val="141212"/>
+          </a:solidFill>
+          <a:ln>
+            <a:noFill/>
+          </a:ln>
+          <a:effectLst/>
+        </p:spPr>
+        <p:style>
+          <a:lnRef idx="1">
+            <a:schemeClr val="accent1"/>
+          </a:lnRef>
+          <a:fillRef idx="3">
+            <a:schemeClr val="accent1"/>
+          </a:fillRef>
+          <a:effectRef idx="2">
+            <a:schemeClr val="accent1"/>
+          </a:effectRef>
+          <a:fontRef idx="minor">
+            <a:schemeClr val="lt1"/>
+          </a:fontRef>
+        </p:style>
+        <p:txBody>
+          <a:bodyPr rtlCol="0" anchor="ctr"/>
+          <a:lstStyle/>
+          <a:p>
+            <a:pPr algn="ctr"/>
+          </a:p>
+        </p:txBody>
+      </p:sp>
+      <p:sp>
+        <p:nvSpPr>
+          <p:cNvPr id="16" name="Oval 15"/>
+          <p:cNvSpPr/>
+          <p:nvPr/>
+        </p:nvSpPr>
+        <p:spPr>
+          <a:xfrm>
+            <a:off x="1124712" y="3771900"/>
+            <a:ext cx="137160" cy="137160"/>
+          </a:xfrm>
+          <a:prstGeom prst="ellipse">
+            <a:avLst/>
+          </a:prstGeom>
+          <a:solidFill>
+            <a:srgbClr val="141212"/>
+          </a:solidFill>
+          <a:ln>
+            <a:noFill/>
+          </a:ln>
+          <a:effectLst/>
+        </p:spPr>
+        <p:style>
+          <a:lnRef idx="1">
+            <a:schemeClr val="accent1"/>
+          </a:lnRef>
+          <a:fillRef idx="3">
+            <a:schemeClr val="accent1"/>
+          </a:fillRef>
+          <a:effectRef idx="2">
+            <a:schemeClr val="accent1"/>
+          </a:effectRef>
+          <a:fontRef idx="minor">
+            <a:schemeClr val="lt1"/>
+          </a:fontRef>
+        </p:style>
+        <p:txBody>
+          <a:bodyPr rtlCol="0" anchor="ctr"/>
+          <a:lstStyle/>
+          <a:p>
+            <a:pPr algn="ctr"/>
+          </a:p>
+        </p:txBody>
+      </p:sp>
+      <p:sp>
+        <p:nvSpPr>
+          <p:cNvPr id="17" name="TextBox 16"/>
+          <p:cNvSpPr txBox="1"/>
+          <p:nvPr/>
+        </p:nvSpPr>
+        <p:spPr>
+          <a:xfrm>
+            <a:off x="804672" y="3959352"/>
+            <a:ext cx="914400" cy="182880"/>
+          </a:xfrm>
+          <a:prstGeom prst="rect">
+            <a:avLst/>
+          </a:prstGeom>
+          <a:noFill/>
+        </p:spPr>
+        <p:txBody>
+          <a:bodyPr wrap="square" anchor="t" lIns="0" rIns="0" tIns="0" bIns="0">
+            <a:spAutoFit/>
+          </a:bodyPr>
+          <a:lstStyle/>
+          <a:p>
+            <a:pPr algn="ctr">
+              <a:lnSpc>
+                <a:spcPct val="100000"/>
+              </a:lnSpc>
+              <a:spcBef>
+                <a:spcPts val="0"/>
+              </a:spcBef>
+              <a:spcAft>
+                <a:spcPts val="0"/>
+              </a:spcAft>
+            </a:pPr>
+            <a:r>
+              <a:rPr sz="650" b="0">
+                <a:solidFill>
+                  <a:srgbClr val="5A5757"/>
+                </a:solidFill>
+                <a:latin typeface="DM Sans"/>
+              </a:rPr>
+              <a:t>Датчики</a:t>
+            </a:r>
+          </a:p>
+        </p:txBody>
+      </p:sp>
+      <p:sp>
+        <p:nvSpPr>
+          <p:cNvPr id="18" name="TextBox 17"/>
+          <p:cNvSpPr txBox="1"/>
+          <p:nvPr/>
+        </p:nvSpPr>
+        <p:spPr>
+          <a:xfrm>
+            <a:off x="1600200" y="3163824"/>
+            <a:ext cx="1417320" cy="164592"/>
+          </a:xfrm>
+          <a:prstGeom prst="rect">
+            <a:avLst/>
+          </a:prstGeom>
+          <a:noFill/>
+        </p:spPr>
+        <p:txBody>
+          <a:bodyPr wrap="square" anchor="t" lIns="0" rIns="0" tIns="0" bIns="0">
+            <a:spAutoFit/>
+          </a:bodyPr>
+          <a:lstStyle/>
+          <a:p>
+            <a:pPr algn="ctr">
+              <a:lnSpc>
+                <a:spcPct val="100000"/>
+              </a:lnSpc>
+              <a:spcBef>
+                <a:spcPts val="0"/>
+              </a:spcBef>
+              <a:spcAft>
+                <a:spcPts val="0"/>
+              </a:spcAft>
+            </a:pPr>
+            <a:r>
+              <a:rPr sz="600" b="0">
+                <a:solidFill>
+                  <a:srgbClr val="5A5757"/>
+                </a:solidFill>
+                <a:latin typeface="DM Sans"/>
+              </a:rPr>
+              <a:t>LoRaWAN · Wi-Fi</a:t>
+            </a:r>
+          </a:p>
+        </p:txBody>
+      </p:sp>
+      <p:sp>
+        <p:nvSpPr>
+          <p:cNvPr id="19" name="Rounded Rectangle 18"/>
+          <p:cNvSpPr/>
+          <p:nvPr/>
+        </p:nvSpPr>
+        <p:spPr>
+          <a:xfrm>
+            <a:off x="1783080" y="3346704"/>
+            <a:ext cx="1051560" cy="438912"/>
+          </a:xfrm>
+          <a:prstGeom prst="roundRect">
+            <a:avLst>
+              <a:gd name="adj" fmla="val 18000"/>
+            </a:avLst>
+          </a:prstGeom>
+          <a:solidFill>
+            <a:srgbClr val="B72E26"/>
+          </a:solidFill>
+          <a:ln>
+            <a:noFill/>
+          </a:ln>
+          <a:effectLst/>
+        </p:spPr>
+        <p:style>
+          <a:lnRef idx="1">
+            <a:schemeClr val="accent1"/>
+          </a:lnRef>
+          <a:fillRef idx="3">
+            <a:schemeClr val="accent1"/>
+          </a:fillRef>
+          <a:effectRef idx="2">
+            <a:schemeClr val="accent1"/>
+          </a:effectRef>
+          <a:fontRef idx="minor">
+            <a:schemeClr val="lt1"/>
+          </a:fontRef>
+        </p:style>
+        <p:txBody>
+          <a:bodyPr rtlCol="0" anchor="ctr" wrap="square" lIns="36576" rIns="36576"/>
+          <a:lstStyle/>
+          <a:p>
+            <a:pPr algn="ctr">
+              <a:lnSpc>
+                <a:spcPct val="105000"/>
+              </a:lnSpc>
+              <a:spcBef>
+                <a:spcPts val="0"/>
+              </a:spcBef>
+              <a:spcAft>
+                <a:spcPts val="0"/>
+              </a:spcAft>
+            </a:pPr>
+            <a:r>
+              <a:rPr sz="1050" b="1">
+                <a:solidFill>
+                  <a:srgbClr val="FFFFFF"/>
+                </a:solidFill>
+                <a:latin typeface="DM Sans"/>
+              </a:rPr>
+              <a:t>RH570</a:t>
+            </a:r>
+          </a:p>
+        </p:txBody>
+      </p:sp>
+      <p:sp>
+        <p:nvSpPr>
+          <p:cNvPr id="20" name="TextBox 19"/>
+          <p:cNvSpPr txBox="1"/>
+          <p:nvPr/>
+        </p:nvSpPr>
+        <p:spPr>
+          <a:xfrm>
+            <a:off x="1600200" y="3803904"/>
+            <a:ext cx="1417320" cy="164592"/>
+          </a:xfrm>
+          <a:prstGeom prst="rect">
+            <a:avLst/>
+          </a:prstGeom>
+          <a:noFill/>
+        </p:spPr>
+        <p:txBody>
+          <a:bodyPr wrap="square" anchor="t" lIns="0" rIns="0" tIns="0" bIns="0">
+            <a:spAutoFit/>
+          </a:bodyPr>
+          <a:lstStyle/>
+          <a:p>
+            <a:pPr algn="ctr">
+              <a:lnSpc>
+                <a:spcPct val="100000"/>
+              </a:lnSpc>
+              <a:spcBef>
+                <a:spcPts val="0"/>
+              </a:spcBef>
+              <a:spcAft>
+                <a:spcPts val="0"/>
+              </a:spcAft>
+            </a:pPr>
+            <a:r>
+              <a:rPr sz="600" b="0">
+                <a:solidFill>
+                  <a:srgbClr val="5A5757"/>
+                </a:solidFill>
+                <a:latin typeface="DM Sans"/>
+              </a:rPr>
+              <a:t>Шлюз</a:t>
+            </a:r>
+          </a:p>
+        </p:txBody>
+      </p:sp>
+      <p:cxnSp>
+        <p:nvCxnSpPr>
+          <p:cNvPr id="21" name="Connector 20"/>
+          <p:cNvCxnSpPr/>
+          <p:nvPr/>
+        </p:nvCxnSpPr>
+        <p:spPr>
+          <a:xfrm>
+            <a:off x="2834640" y="3566160"/>
+            <a:ext cx="1691640" cy="0"/>
+          </a:xfrm>
+          <a:prstGeom prst="line">
+            <a:avLst/>
+          </a:prstGeom>
+          <a:ln w="13970">
+            <a:solidFill>
+              <a:srgbClr val="141212"/>
+            </a:solidFill>
+          </a:ln>
+          <a:effectLst/>
+        </p:spPr>
+        <p:style>
+          <a:lnRef idx="2">
+            <a:schemeClr val="accent1"/>
+          </a:lnRef>
+          <a:fillRef idx="0">
+            <a:schemeClr val="accent1"/>
+          </a:fillRef>
+          <a:effectRef idx="1">
+            <a:schemeClr val="accent1"/>
+          </a:effectRef>
+          <a:fontRef idx="minor">
+            <a:schemeClr val="tx1"/>
+          </a:fontRef>
+        </p:style>
+      </p:cxnSp>
+      <p:sp>
+        <p:nvSpPr>
+          <p:cNvPr id="22" name="Rounded Rectangle 21"/>
+          <p:cNvSpPr/>
+          <p:nvPr/>
+        </p:nvSpPr>
+        <p:spPr>
+          <a:xfrm>
+            <a:off x="4526280" y="3346704"/>
+            <a:ext cx="1051560" cy="438912"/>
+          </a:xfrm>
+          <a:prstGeom prst="roundRect">
+            <a:avLst>
+              <a:gd name="adj" fmla="val 18000"/>
+            </a:avLst>
+          </a:prstGeom>
+          <a:solidFill>
+            <a:srgbClr val="141212"/>
+          </a:solidFill>
+          <a:ln>
+            <a:noFill/>
+          </a:ln>
+          <a:effectLst/>
+        </p:spPr>
+        <p:style>
+          <a:lnRef idx="1">
+            <a:schemeClr val="accent1"/>
+          </a:lnRef>
+          <a:fillRef idx="3">
+            <a:schemeClr val="accent1"/>
+          </a:fillRef>
+          <a:effectRef idx="2">
+            <a:schemeClr val="accent1"/>
+          </a:effectRef>
+          <a:fontRef idx="minor">
+            <a:schemeClr val="lt1"/>
+          </a:fontRef>
+        </p:style>
+        <p:txBody>
+          <a:bodyPr rtlCol="0" anchor="ctr" wrap="square" lIns="36576" rIns="36576"/>
+          <a:lstStyle/>
+          <a:p>
+            <a:pPr algn="ctr">
+              <a:lnSpc>
+                <a:spcPct val="105000"/>
+              </a:lnSpc>
+              <a:spcBef>
+                <a:spcPts val="0"/>
+              </a:spcBef>
+              <a:spcAft>
+                <a:spcPts val="0"/>
+              </a:spcAft>
+            </a:pPr>
+            <a:r>
+              <a:rPr sz="850" b="1">
+                <a:solidFill>
+                  <a:srgbClr val="FFFFFF"/>
+                </a:solidFill>
+                <a:latin typeface="DM Sans"/>
+              </a:rPr>
+              <a:t>СЕРВЕР</a:t>
+            </a:r>
+          </a:p>
+          <a:p>
+            <a:pPr algn="ctr">
+              <a:lnSpc>
+                <a:spcPct val="105000"/>
+              </a:lnSpc>
+              <a:spcBef>
+                <a:spcPts val="0"/>
+              </a:spcBef>
+              <a:spcAft>
+                <a:spcPts val="0"/>
+              </a:spcAft>
+            </a:pPr>
+            <a:r>
+              <a:rPr sz="850" b="1">
+                <a:solidFill>
+                  <a:srgbClr val="FFFFFF"/>
+                </a:solidFill>
+                <a:latin typeface="DM Sans"/>
+              </a:rPr>
+              <a:t>АСУ ТП</a:t>
+            </a:r>
+          </a:p>
+        </p:txBody>
+      </p:sp>
+      <p:sp>
+        <p:nvSpPr>
+          <p:cNvPr id="23" name="TextBox 22"/>
+          <p:cNvSpPr txBox="1"/>
+          <p:nvPr/>
+        </p:nvSpPr>
+        <p:spPr>
+          <a:xfrm>
+            <a:off x="4251960" y="3803904"/>
+            <a:ext cx="1600200" cy="164592"/>
+          </a:xfrm>
+          <a:prstGeom prst="rect">
+            <a:avLst/>
+          </a:prstGeom>
+          <a:noFill/>
+        </p:spPr>
+        <p:txBody>
+          <a:bodyPr wrap="square" anchor="t" lIns="0" rIns="0" tIns="0" bIns="0">
+            <a:spAutoFit/>
+          </a:bodyPr>
+          <a:lstStyle/>
+          <a:p>
+            <a:pPr algn="ctr">
+              <a:lnSpc>
+                <a:spcPct val="100000"/>
+              </a:lnSpc>
+              <a:spcBef>
+                <a:spcPts val="0"/>
+              </a:spcBef>
+              <a:spcAft>
+                <a:spcPts val="0"/>
+              </a:spcAft>
+            </a:pPr>
+            <a:r>
+              <a:rPr sz="600" b="0">
+                <a:solidFill>
+                  <a:srgbClr val="5A5757"/>
+                </a:solidFill>
+                <a:latin typeface="DM Sans"/>
+              </a:rPr>
+              <a:t>Хранение и анализ</a:t>
+            </a:r>
+          </a:p>
+        </p:txBody>
+      </p:sp>
+      <p:sp>
+        <p:nvSpPr>
+          <p:cNvPr id="24" name="TextBox 23"/>
+          <p:cNvSpPr txBox="1"/>
+          <p:nvPr/>
+        </p:nvSpPr>
+        <p:spPr>
+          <a:xfrm>
+            <a:off x="868680" y="4160520"/>
+            <a:ext cx="4846320" cy="384048"/>
+          </a:xfrm>
+          <a:prstGeom prst="rect">
+            <a:avLst/>
+          </a:prstGeom>
+          <a:noFill/>
+        </p:spPr>
+        <p:txBody>
+          <a:bodyPr wrap="square" anchor="t" lIns="0" rIns="0" tIns="0" bIns="0">
+            <a:spAutoFit/>
+          </a:bodyPr>
+          <a:lstStyle/>
+          <a:p>
+            <a:pPr algn="l">
+              <a:lnSpc>
+                <a:spcPct val="125000"/>
+              </a:lnSpc>
+              <a:spcBef>
+                <a:spcPts val="0"/>
+              </a:spcBef>
+              <a:spcAft>
+                <a:spcPts val="0"/>
+              </a:spcAft>
+            </a:pPr>
+            <a:r>
+              <a:rPr sz="1200" b="0">
+                <a:solidFill>
+                  <a:srgbClr val="5A5757"/>
+                </a:solidFill>
+                <a:latin typeface="DM Sans"/>
+              </a:rPr>
+              <a:t>Развёртывание без прокладки кабельных трасс — для распределённого и труднодоступного оборудования.</a:t>
+            </a:r>
+          </a:p>
+        </p:txBody>
+      </p:sp>
+      <p:sp>
+        <p:nvSpPr>
+          <p:cNvPr id="25" name="Rectangle 24"/>
+          <p:cNvSpPr/>
+          <p:nvPr/>
+        </p:nvSpPr>
+        <p:spPr>
+          <a:xfrm>
+            <a:off x="6172200" y="1965960"/>
+            <a:ext cx="5486400" cy="41148"/>
+          </a:xfrm>
+          <a:prstGeom prst="rect">
+            <a:avLst/>
+          </a:prstGeom>
+          <a:solidFill>
+            <a:srgbClr val="141212"/>
+          </a:solidFill>
+          <a:ln>
+            <a:noFill/>
+          </a:ln>
+          <a:effectLst/>
+        </p:spPr>
+        <p:style>
+          <a:lnRef idx="1">
+            <a:schemeClr val="accent1"/>
+          </a:lnRef>
+          <a:fillRef idx="3">
+            <a:schemeClr val="accent1"/>
+          </a:fillRef>
+          <a:effectRef idx="2">
+            <a:schemeClr val="accent1"/>
+          </a:effectRef>
+          <a:fontRef idx="minor">
+            <a:schemeClr val="lt1"/>
+          </a:fontRef>
+        </p:style>
+        <p:txBody>
+          <a:bodyPr rtlCol="0" anchor="ctr"/>
+          <a:lstStyle/>
+          <a:p>
+            <a:pPr algn="ctr"/>
+          </a:p>
+        </p:txBody>
+      </p:sp>
+      <p:sp>
+        <p:nvSpPr>
+          <p:cNvPr id="26" name="Rectangle 25"/>
           <p:cNvSpPr/>
           <p:nvPr/>
         </p:nvSpPr>
@@ -6487,7 +7055,7 @@
       </p:sp>
       <p:sp>
         <p:nvSpPr>
-          <p:cNvPr id="14" name="TextBox 13"/>
+          <p:cNvPr id="27" name="TextBox 26"/>
           <p:cNvSpPr txBox="1"/>
           <p:nvPr/>
         </p:nvSpPr>
@@ -6532,7 +7100,7 @@
       </p:sp>
       <p:sp>
         <p:nvSpPr>
-          <p:cNvPr id="15" name="TextBox 14"/>
+          <p:cNvPr id="28" name="TextBox 27"/>
           <p:cNvSpPr txBox="1"/>
           <p:nvPr/>
         </p:nvSpPr>
@@ -6577,22 +7145,503 @@
       </p:sp>
       <p:sp>
         <p:nvSpPr>
-          <p:cNvPr id="16" name="Rectangle 15"/>
+          <p:cNvPr id="29" name="Rectangle 28"/>
           <p:cNvSpPr/>
           <p:nvPr/>
         </p:nvSpPr>
         <p:spPr>
           <a:xfrm>
-            <a:off x="6492240" y="3063240"/>
-            <a:ext cx="4846320" cy="1051560"/>
+            <a:off x="6492240" y="3017520"/>
+            <a:ext cx="4846320" cy="1097280"/>
           </a:xfrm>
           <a:prstGeom prst="rect">
             <a:avLst/>
           </a:prstGeom>
           <a:solidFill>
-            <a:srgbClr val="F6E3E1"/>
+            <a:srgbClr val="F1EFEE"/>
           </a:solidFill>
-          <a:ln w="9525">
+          <a:ln>
+            <a:noFill/>
+          </a:ln>
+          <a:effectLst/>
+        </p:spPr>
+        <p:style>
+          <a:lnRef idx="1">
+            <a:schemeClr val="accent1"/>
+          </a:lnRef>
+          <a:fillRef idx="3">
+            <a:schemeClr val="accent1"/>
+          </a:fillRef>
+          <a:effectRef idx="2">
+            <a:schemeClr val="accent1"/>
+          </a:effectRef>
+          <a:fontRef idx="minor">
+            <a:schemeClr val="lt1"/>
+          </a:fontRef>
+        </p:style>
+        <p:txBody>
+          <a:bodyPr rtlCol="0" anchor="ctr"/>
+          <a:lstStyle/>
+          <a:p>
+            <a:pPr algn="ctr"/>
+          </a:p>
+        </p:txBody>
+      </p:sp>
+      <p:cxnSp>
+        <p:nvCxnSpPr>
+          <p:cNvPr id="30" name="Connector 29"/>
+          <p:cNvCxnSpPr/>
+          <p:nvPr/>
+        </p:nvCxnSpPr>
+        <p:spPr>
+          <a:xfrm>
+            <a:off x="6816852" y="3291840"/>
+            <a:ext cx="589788" cy="274320"/>
+          </a:xfrm>
+          <a:prstGeom prst="line">
+            <a:avLst/>
+          </a:prstGeom>
+          <a:ln w="13970">
+            <a:solidFill>
+              <a:srgbClr val="6E6A69"/>
+            </a:solidFill>
+          </a:ln>
+          <a:effectLst/>
+        </p:spPr>
+        <p:style>
+          <a:lnRef idx="2">
+            <a:schemeClr val="accent1"/>
+          </a:lnRef>
+          <a:fillRef idx="0">
+            <a:schemeClr val="accent1"/>
+          </a:fillRef>
+          <a:effectRef idx="1">
+            <a:schemeClr val="accent1"/>
+          </a:effectRef>
+          <a:fontRef idx="minor">
+            <a:schemeClr val="tx1"/>
+          </a:fontRef>
+        </p:style>
+      </p:cxnSp>
+      <p:cxnSp>
+        <p:nvCxnSpPr>
+          <p:cNvPr id="31" name="Connector 30"/>
+          <p:cNvCxnSpPr/>
+          <p:nvPr/>
+        </p:nvCxnSpPr>
+        <p:spPr>
+          <a:xfrm>
+            <a:off x="6816852" y="3566160"/>
+            <a:ext cx="589788" cy="0"/>
+          </a:xfrm>
+          <a:prstGeom prst="line">
+            <a:avLst/>
+          </a:prstGeom>
+          <a:ln w="13970">
+            <a:solidFill>
+              <a:srgbClr val="6E6A69"/>
+            </a:solidFill>
+          </a:ln>
+          <a:effectLst/>
+        </p:spPr>
+        <p:style>
+          <a:lnRef idx="2">
+            <a:schemeClr val="accent1"/>
+          </a:lnRef>
+          <a:fillRef idx="0">
+            <a:schemeClr val="accent1"/>
+          </a:fillRef>
+          <a:effectRef idx="1">
+            <a:schemeClr val="accent1"/>
+          </a:effectRef>
+          <a:fontRef idx="minor">
+            <a:schemeClr val="tx1"/>
+          </a:fontRef>
+        </p:style>
+      </p:cxnSp>
+      <p:cxnSp>
+        <p:nvCxnSpPr>
+          <p:cNvPr id="32" name="Connector 31"/>
+          <p:cNvCxnSpPr/>
+          <p:nvPr/>
+        </p:nvCxnSpPr>
+        <p:spPr>
+          <a:xfrm flipV="1">
+            <a:off x="6816852" y="3566160"/>
+            <a:ext cx="589788" cy="274320"/>
+          </a:xfrm>
+          <a:prstGeom prst="line">
+            <a:avLst/>
+          </a:prstGeom>
+          <a:ln w="13970">
+            <a:solidFill>
+              <a:srgbClr val="6E6A69"/>
+            </a:solidFill>
+          </a:ln>
+          <a:effectLst/>
+        </p:spPr>
+        <p:style>
+          <a:lnRef idx="2">
+            <a:schemeClr val="accent1"/>
+          </a:lnRef>
+          <a:fillRef idx="0">
+            <a:schemeClr val="accent1"/>
+          </a:fillRef>
+          <a:effectRef idx="1">
+            <a:schemeClr val="accent1"/>
+          </a:effectRef>
+          <a:fontRef idx="minor">
+            <a:schemeClr val="tx1"/>
+          </a:fontRef>
+        </p:style>
+      </p:cxnSp>
+      <p:sp>
+        <p:nvSpPr>
+          <p:cNvPr id="33" name="Oval 32"/>
+          <p:cNvSpPr/>
+          <p:nvPr/>
+        </p:nvSpPr>
+        <p:spPr>
+          <a:xfrm>
+            <a:off x="6748272" y="3223260"/>
+            <a:ext cx="137160" cy="137160"/>
+          </a:xfrm>
+          <a:prstGeom prst="ellipse">
+            <a:avLst/>
+          </a:prstGeom>
+          <a:solidFill>
+            <a:srgbClr val="141212"/>
+          </a:solidFill>
+          <a:ln>
+            <a:noFill/>
+          </a:ln>
+          <a:effectLst/>
+        </p:spPr>
+        <p:style>
+          <a:lnRef idx="1">
+            <a:schemeClr val="accent1"/>
+          </a:lnRef>
+          <a:fillRef idx="3">
+            <a:schemeClr val="accent1"/>
+          </a:fillRef>
+          <a:effectRef idx="2">
+            <a:schemeClr val="accent1"/>
+          </a:effectRef>
+          <a:fontRef idx="minor">
+            <a:schemeClr val="lt1"/>
+          </a:fontRef>
+        </p:style>
+        <p:txBody>
+          <a:bodyPr rtlCol="0" anchor="ctr"/>
+          <a:lstStyle/>
+          <a:p>
+            <a:pPr algn="ctr"/>
+          </a:p>
+        </p:txBody>
+      </p:sp>
+      <p:sp>
+        <p:nvSpPr>
+          <p:cNvPr id="34" name="Oval 33"/>
+          <p:cNvSpPr/>
+          <p:nvPr/>
+        </p:nvSpPr>
+        <p:spPr>
+          <a:xfrm>
+            <a:off x="6748272" y="3497580"/>
+            <a:ext cx="137160" cy="137160"/>
+          </a:xfrm>
+          <a:prstGeom prst="ellipse">
+            <a:avLst/>
+          </a:prstGeom>
+          <a:solidFill>
+            <a:srgbClr val="141212"/>
+          </a:solidFill>
+          <a:ln>
+            <a:noFill/>
+          </a:ln>
+          <a:effectLst/>
+        </p:spPr>
+        <p:style>
+          <a:lnRef idx="1">
+            <a:schemeClr val="accent1"/>
+          </a:lnRef>
+          <a:fillRef idx="3">
+            <a:schemeClr val="accent1"/>
+          </a:fillRef>
+          <a:effectRef idx="2">
+            <a:schemeClr val="accent1"/>
+          </a:effectRef>
+          <a:fontRef idx="minor">
+            <a:schemeClr val="lt1"/>
+          </a:fontRef>
+        </p:style>
+        <p:txBody>
+          <a:bodyPr rtlCol="0" anchor="ctr"/>
+          <a:lstStyle/>
+          <a:p>
+            <a:pPr algn="ctr"/>
+          </a:p>
+        </p:txBody>
+      </p:sp>
+      <p:sp>
+        <p:nvSpPr>
+          <p:cNvPr id="35" name="Oval 34"/>
+          <p:cNvSpPr/>
+          <p:nvPr/>
+        </p:nvSpPr>
+        <p:spPr>
+          <a:xfrm>
+            <a:off x="6748272" y="3771900"/>
+            <a:ext cx="137160" cy="137160"/>
+          </a:xfrm>
+          <a:prstGeom prst="ellipse">
+            <a:avLst/>
+          </a:prstGeom>
+          <a:solidFill>
+            <a:srgbClr val="141212"/>
+          </a:solidFill>
+          <a:ln>
+            <a:noFill/>
+          </a:ln>
+          <a:effectLst/>
+        </p:spPr>
+        <p:style>
+          <a:lnRef idx="1">
+            <a:schemeClr val="accent1"/>
+          </a:lnRef>
+          <a:fillRef idx="3">
+            <a:schemeClr val="accent1"/>
+          </a:fillRef>
+          <a:effectRef idx="2">
+            <a:schemeClr val="accent1"/>
+          </a:effectRef>
+          <a:fontRef idx="minor">
+            <a:schemeClr val="lt1"/>
+          </a:fontRef>
+        </p:style>
+        <p:txBody>
+          <a:bodyPr rtlCol="0" anchor="ctr"/>
+          <a:lstStyle/>
+          <a:p>
+            <a:pPr algn="ctr"/>
+          </a:p>
+        </p:txBody>
+      </p:sp>
+      <p:sp>
+        <p:nvSpPr>
+          <p:cNvPr id="36" name="TextBox 35"/>
+          <p:cNvSpPr txBox="1"/>
+          <p:nvPr/>
+        </p:nvSpPr>
+        <p:spPr>
+          <a:xfrm>
+            <a:off x="6428232" y="3959352"/>
+            <a:ext cx="914400" cy="182880"/>
+          </a:xfrm>
+          <a:prstGeom prst="rect">
+            <a:avLst/>
+          </a:prstGeom>
+          <a:noFill/>
+        </p:spPr>
+        <p:txBody>
+          <a:bodyPr wrap="square" anchor="t" lIns="0" rIns="0" tIns="0" bIns="0">
+            <a:spAutoFit/>
+          </a:bodyPr>
+          <a:lstStyle/>
+          <a:p>
+            <a:pPr algn="ctr">
+              <a:lnSpc>
+                <a:spcPct val="100000"/>
+              </a:lnSpc>
+              <a:spcBef>
+                <a:spcPts val="0"/>
+              </a:spcBef>
+              <a:spcAft>
+                <a:spcPts val="0"/>
+              </a:spcAft>
+            </a:pPr>
+            <a:r>
+              <a:rPr sz="650" b="0">
+                <a:solidFill>
+                  <a:srgbClr val="5A5757"/>
+                </a:solidFill>
+                <a:latin typeface="DM Sans"/>
+              </a:rPr>
+              <a:t>Датчики</a:t>
+            </a:r>
+          </a:p>
+        </p:txBody>
+      </p:sp>
+      <p:sp>
+        <p:nvSpPr>
+          <p:cNvPr id="37" name="TextBox 36"/>
+          <p:cNvSpPr txBox="1"/>
+          <p:nvPr/>
+        </p:nvSpPr>
+        <p:spPr>
+          <a:xfrm>
+            <a:off x="7223760" y="3163824"/>
+            <a:ext cx="1417320" cy="164592"/>
+          </a:xfrm>
+          <a:prstGeom prst="rect">
+            <a:avLst/>
+          </a:prstGeom>
+          <a:noFill/>
+        </p:spPr>
+        <p:txBody>
+          <a:bodyPr wrap="square" anchor="t" lIns="0" rIns="0" tIns="0" bIns="0">
+            <a:spAutoFit/>
+          </a:bodyPr>
+          <a:lstStyle/>
+          <a:p>
+            <a:pPr algn="ctr">
+              <a:lnSpc>
+                <a:spcPct val="100000"/>
+              </a:lnSpc>
+              <a:spcBef>
+                <a:spcPts val="0"/>
+              </a:spcBef>
+              <a:spcAft>
+                <a:spcPts val="0"/>
+              </a:spcAft>
+            </a:pPr>
+            <a:r>
+              <a:rPr sz="600" b="0">
+                <a:solidFill>
+                  <a:srgbClr val="5A5757"/>
+                </a:solidFill>
+                <a:latin typeface="DM Sans"/>
+              </a:rPr>
+              <a:t>RS-485 · Ethernet</a:t>
+            </a:r>
+          </a:p>
+        </p:txBody>
+      </p:sp>
+      <p:sp>
+        <p:nvSpPr>
+          <p:cNvPr id="38" name="Rounded Rectangle 37"/>
+          <p:cNvSpPr/>
+          <p:nvPr/>
+        </p:nvSpPr>
+        <p:spPr>
+          <a:xfrm>
+            <a:off x="7406640" y="3346704"/>
+            <a:ext cx="1051560" cy="438912"/>
+          </a:xfrm>
+          <a:prstGeom prst="roundRect">
+            <a:avLst>
+              <a:gd name="adj" fmla="val 18000"/>
+            </a:avLst>
+          </a:prstGeom>
+          <a:solidFill>
+            <a:srgbClr val="141212"/>
+          </a:solidFill>
+          <a:ln>
+            <a:noFill/>
+          </a:ln>
+          <a:effectLst/>
+        </p:spPr>
+        <p:style>
+          <a:lnRef idx="1">
+            <a:schemeClr val="accent1"/>
+          </a:lnRef>
+          <a:fillRef idx="3">
+            <a:schemeClr val="accent1"/>
+          </a:fillRef>
+          <a:effectRef idx="2">
+            <a:schemeClr val="accent1"/>
+          </a:effectRef>
+          <a:fontRef idx="minor">
+            <a:schemeClr val="lt1"/>
+          </a:fontRef>
+        </p:style>
+        <p:txBody>
+          <a:bodyPr rtlCol="0" anchor="ctr" wrap="square" lIns="36576" rIns="36576"/>
+          <a:lstStyle/>
+          <a:p>
+            <a:pPr algn="ctr">
+              <a:lnSpc>
+                <a:spcPct val="105000"/>
+              </a:lnSpc>
+              <a:spcBef>
+                <a:spcPts val="0"/>
+              </a:spcBef>
+              <a:spcAft>
+                <a:spcPts val="0"/>
+              </a:spcAft>
+            </a:pPr>
+            <a:r>
+              <a:rPr sz="1050" b="1">
+                <a:solidFill>
+                  <a:srgbClr val="FFFFFF"/>
+                </a:solidFill>
+                <a:latin typeface="DM Sans"/>
+              </a:rPr>
+              <a:t>RH2000</a:t>
+            </a:r>
+          </a:p>
+        </p:txBody>
+      </p:sp>
+      <p:sp>
+        <p:nvSpPr>
+          <p:cNvPr id="39" name="TextBox 38"/>
+          <p:cNvSpPr txBox="1"/>
+          <p:nvPr/>
+        </p:nvSpPr>
+        <p:spPr>
+          <a:xfrm>
+            <a:off x="7223760" y="3803904"/>
+            <a:ext cx="1417320" cy="164592"/>
+          </a:xfrm>
+          <a:prstGeom prst="rect">
+            <a:avLst/>
+          </a:prstGeom>
+          <a:noFill/>
+        </p:spPr>
+        <p:txBody>
+          <a:bodyPr wrap="square" anchor="t" lIns="0" rIns="0" tIns="0" bIns="0">
+            <a:spAutoFit/>
+          </a:bodyPr>
+          <a:lstStyle/>
+          <a:p>
+            <a:pPr algn="ctr">
+              <a:lnSpc>
+                <a:spcPct val="100000"/>
+              </a:lnSpc>
+              <a:spcBef>
+                <a:spcPts val="0"/>
+              </a:spcBef>
+              <a:spcAft>
+                <a:spcPts val="0"/>
+              </a:spcAft>
+            </a:pPr>
+            <a:r>
+              <a:rPr sz="600" b="0">
+                <a:solidFill>
+                  <a:srgbClr val="5A5757"/>
+                </a:solidFill>
+                <a:latin typeface="DM Sans"/>
+              </a:rPr>
+              <a:t>Шлюз</a:t>
+            </a:r>
+          </a:p>
+        </p:txBody>
+      </p:sp>
+      <p:cxnSp>
+        <p:nvCxnSpPr>
+          <p:cNvPr id="40" name="Connector 39"/>
+          <p:cNvCxnSpPr/>
+          <p:nvPr/>
+        </p:nvCxnSpPr>
+        <p:spPr>
+          <a:xfrm>
+            <a:off x="8458200" y="3566160"/>
+            <a:ext cx="1691640" cy="0"/>
+          </a:xfrm>
+          <a:prstGeom prst="line">
+            <a:avLst/>
+          </a:prstGeom>
+          <a:ln w="13970">
             <a:solidFill>
               <a:srgbClr val="B72E26"/>
             </a:solidFill>
@@ -6600,6 +7649,45 @@
           <a:effectLst/>
         </p:spPr>
         <p:style>
+          <a:lnRef idx="2">
+            <a:schemeClr val="accent1"/>
+          </a:lnRef>
+          <a:fillRef idx="0">
+            <a:schemeClr val="accent1"/>
+          </a:fillRef>
+          <a:effectRef idx="1">
+            <a:schemeClr val="accent1"/>
+          </a:effectRef>
+          <a:fontRef idx="minor">
+            <a:schemeClr val="tx1"/>
+          </a:fontRef>
+        </p:style>
+      </p:cxnSp>
+      <p:sp>
+        <p:nvSpPr>
+          <p:cNvPr id="41" name="Rounded Rectangle 40"/>
+          <p:cNvSpPr/>
+          <p:nvPr/>
+        </p:nvSpPr>
+        <p:spPr>
+          <a:xfrm>
+            <a:off x="10149840" y="3346704"/>
+            <a:ext cx="1051560" cy="438912"/>
+          </a:xfrm>
+          <a:prstGeom prst="roundRect">
+            <a:avLst>
+              <a:gd name="adj" fmla="val 18000"/>
+            </a:avLst>
+          </a:prstGeom>
+          <a:solidFill>
+            <a:srgbClr val="B72E26"/>
+          </a:solidFill>
+          <a:ln>
+            <a:noFill/>
+          </a:ln>
+          <a:effectLst/>
+        </p:spPr>
+        <p:style>
           <a:lnRef idx="1">
             <a:schemeClr val="accent1"/>
           </a:lnRef>
@@ -6614,64 +7702,64 @@
           </a:fontRef>
         </p:style>
         <p:txBody>
-          <a:bodyPr rtlCol="0" anchor="ctr" wrap="square" lIns="137160" rIns="137160"/>
+          <a:bodyPr rtlCol="0" anchor="ctr" wrap="square" lIns="36576" rIns="36576"/>
           <a:lstStyle/>
           <a:p>
             <a:pPr algn="ctr">
               <a:lnSpc>
-                <a:spcPct val="120000"/>
-              </a:lnSpc>
-              <a:spcBef>
-                <a:spcPts val="0"/>
-              </a:spcBef>
-              <a:spcAft>
-                <a:spcPts val="0"/>
-              </a:spcAft>
-            </a:pPr>
-            <a:r>
-              <a:rPr sz="1050" b="1">
-                <a:solidFill>
-                  <a:srgbClr val="8C1B13"/>
-                </a:solidFill>
-                <a:latin typeface="DM Sans"/>
-              </a:rPr>
-              <a:t>Схема из исходной презентации (слайды 12–14).</a:t>
+                <a:spcPct val="105000"/>
+              </a:lnSpc>
+              <a:spcBef>
+                <a:spcPts val="0"/>
+              </a:spcBef>
+              <a:spcAft>
+                <a:spcPts val="0"/>
+              </a:spcAft>
+            </a:pPr>
+            <a:r>
+              <a:rPr sz="850" b="1">
+                <a:solidFill>
+                  <a:srgbClr val="FFFFFF"/>
+                </a:solidFill>
+                <a:latin typeface="DM Sans"/>
+              </a:rPr>
+              <a:t>СЕРВЕР</a:t>
             </a:r>
           </a:p>
           <a:p>
             <a:pPr algn="ctr">
               <a:lnSpc>
-                <a:spcPct val="120000"/>
-              </a:lnSpc>
-              <a:spcBef>
-                <a:spcPts val="0"/>
-              </a:spcBef>
-              <a:spcAft>
-                <a:spcPts val="0"/>
-              </a:spcAft>
-            </a:pPr>
-            <a:r>
-              <a:rPr sz="1050" b="1">
-                <a:solidFill>
-                  <a:srgbClr val="8C1B13"/>
-                </a:solidFill>
-                <a:latin typeface="DM Sans"/>
-              </a:rPr>
-              <a:t>Логотипы завода-изготовителя на корпусах приборов удаляются.</a:t>
-            </a:r>
-          </a:p>
-        </p:txBody>
-      </p:sp>
-      <p:sp>
-        <p:nvSpPr>
-          <p:cNvPr id="17" name="TextBox 16"/>
+                <a:spcPct val="105000"/>
+              </a:lnSpc>
+              <a:spcBef>
+                <a:spcPts val="0"/>
+              </a:spcBef>
+              <a:spcAft>
+                <a:spcPts val="0"/>
+              </a:spcAft>
+            </a:pPr>
+            <a:r>
+              <a:rPr sz="850" b="1">
+                <a:solidFill>
+                  <a:srgbClr val="FFFFFF"/>
+                </a:solidFill>
+                <a:latin typeface="DM Sans"/>
+              </a:rPr>
+              <a:t>АСУ ТП</a:t>
+            </a:r>
+          </a:p>
+        </p:txBody>
+      </p:sp>
+      <p:sp>
+        <p:nvSpPr>
+          <p:cNvPr id="42" name="TextBox 41"/>
           <p:cNvSpPr txBox="1"/>
           <p:nvPr/>
         </p:nvSpPr>
         <p:spPr>
           <a:xfrm>
-            <a:off x="6492240" y="4297680"/>
-            <a:ext cx="4846320" cy="640080"/>
+            <a:off x="9875520" y="3803904"/>
+            <a:ext cx="1600200" cy="164592"/>
           </a:xfrm>
           <a:prstGeom prst="rect">
             <a:avLst/>
@@ -6684,19 +7772,64 @@
           </a:bodyPr>
           <a:lstStyle/>
           <a:p>
+            <a:pPr algn="ctr">
+              <a:lnSpc>
+                <a:spcPct val="100000"/>
+              </a:lnSpc>
+              <a:spcBef>
+                <a:spcPts val="0"/>
+              </a:spcBef>
+              <a:spcAft>
+                <a:spcPts val="0"/>
+              </a:spcAft>
+            </a:pPr>
+            <a:r>
+              <a:rPr sz="600" b="0">
+                <a:solidFill>
+                  <a:srgbClr val="5A5757"/>
+                </a:solidFill>
+                <a:latin typeface="DM Sans"/>
+              </a:rPr>
+              <a:t>Хранение и анализ</a:t>
+            </a:r>
+          </a:p>
+        </p:txBody>
+      </p:sp>
+      <p:sp>
+        <p:nvSpPr>
+          <p:cNvPr id="43" name="TextBox 42"/>
+          <p:cNvSpPr txBox="1"/>
+          <p:nvPr/>
+        </p:nvSpPr>
+        <p:spPr>
+          <a:xfrm>
+            <a:off x="6492240" y="4160520"/>
+            <a:ext cx="4846320" cy="384048"/>
+          </a:xfrm>
+          <a:prstGeom prst="rect">
+            <a:avLst/>
+          </a:prstGeom>
+          <a:noFill/>
+        </p:spPr>
+        <p:txBody>
+          <a:bodyPr wrap="square" anchor="t" lIns="0" rIns="0" tIns="0" bIns="0">
+            <a:spAutoFit/>
+          </a:bodyPr>
+          <a:lstStyle/>
+          <a:p>
             <a:pPr algn="l">
               <a:lnSpc>
-                <a:spcPct val="130000"/>
-              </a:lnSpc>
-              <a:spcBef>
-                <a:spcPts val="0"/>
-              </a:spcBef>
-              <a:spcAft>
-                <a:spcPts val="0"/>
-              </a:spcAft>
-            </a:pPr>
-            <a:r>
-              <a:rPr sz="1250" b="0">
+                <a:spcPct val="125000"/>
+              </a:lnSpc>
+              <a:spcBef>
+                <a:spcPts val="0"/>
+              </a:spcBef>
+              <a:spcAft>
+                <a:spcPts val="0"/>
+              </a:spcAft>
+            </a:pPr>
+            <a:r>
+              <a:rPr sz="1200" b="0">
                 <a:solidFill>
                   <a:srgbClr val="5A5757"/>
                 </a:solidFill>
@@ -6709,7 +7842,7 @@
       </p:sp>
       <p:sp>
         <p:nvSpPr>
-          <p:cNvPr id="18" name="TextBox 17"/>
+          <p:cNvPr id="44" name="TextBox 43"/>
           <p:cNvSpPr txBox="1"/>
           <p:nvPr/>
         </p:nvSpPr>
@@ -7313,7 +8446,123 @@
       </p:sp>
       <p:sp>
         <p:nvSpPr>
-          <p:cNvPr id="12" name="TextBox 11"/>
+          <p:cNvPr id="12" name="Oval 11"/>
+          <p:cNvSpPr/>
+          <p:nvPr/>
+        </p:nvSpPr>
+        <p:spPr>
+          <a:xfrm>
+            <a:off x="9619488" y="4453128"/>
+            <a:ext cx="512064" cy="512064"/>
+          </a:xfrm>
+          <a:prstGeom prst="ellipse">
+            <a:avLst/>
+          </a:prstGeom>
+          <a:noFill/>
+          <a:ln w="19050">
+            <a:solidFill>
+              <a:srgbClr val="FFFFFF"/>
+            </a:solidFill>
+          </a:ln>
+          <a:effectLst/>
+        </p:spPr>
+        <p:style>
+          <a:lnRef idx="1">
+            <a:schemeClr val="accent1"/>
+          </a:lnRef>
+          <a:fillRef idx="3">
+            <a:schemeClr val="accent1"/>
+          </a:fillRef>
+          <a:effectRef idx="2">
+            <a:schemeClr val="accent1"/>
+          </a:effectRef>
+          <a:fontRef idx="minor">
+            <a:schemeClr val="lt1"/>
+          </a:fontRef>
+        </p:style>
+        <p:txBody>
+          <a:bodyPr rtlCol="0" anchor="ctr"/>
+          <a:lstStyle/>
+          <a:p>
+            <a:pPr algn="ctr"/>
+          </a:p>
+        </p:txBody>
+      </p:sp>
+      <p:cxnSp>
+        <p:nvCxnSpPr>
+          <p:cNvPr id="13" name="Connector 12"/>
+          <p:cNvCxnSpPr/>
+          <p:nvPr/>
+        </p:nvCxnSpPr>
+        <p:spPr>
+          <a:xfrm>
+            <a:off x="9765792" y="4709160"/>
+            <a:ext cx="91440" cy="91440"/>
+          </a:xfrm>
+          <a:prstGeom prst="line">
+            <a:avLst/>
+          </a:prstGeom>
+          <a:ln w="27940">
+            <a:solidFill>
+              <a:srgbClr val="FFFFFF"/>
+            </a:solidFill>
+          </a:ln>
+          <a:effectLst/>
+        </p:spPr>
+        <p:style>
+          <a:lnRef idx="2">
+            <a:schemeClr val="accent1"/>
+          </a:lnRef>
+          <a:fillRef idx="0">
+            <a:schemeClr val="accent1"/>
+          </a:fillRef>
+          <a:effectRef idx="1">
+            <a:schemeClr val="accent1"/>
+          </a:effectRef>
+          <a:fontRef idx="minor">
+            <a:schemeClr val="tx1"/>
+          </a:fontRef>
+        </p:style>
+      </p:cxnSp>
+      <p:cxnSp>
+        <p:nvCxnSpPr>
+          <p:cNvPr id="14" name="Connector 13"/>
+          <p:cNvCxnSpPr/>
+          <p:nvPr/>
+        </p:nvCxnSpPr>
+        <p:spPr>
+          <a:xfrm flipV="1">
+            <a:off x="9857232" y="4599432"/>
+            <a:ext cx="155448" cy="201168"/>
+          </a:xfrm>
+          <a:prstGeom prst="line">
+            <a:avLst/>
+          </a:prstGeom>
+          <a:ln w="27940">
+            <a:solidFill>
+              <a:srgbClr val="FFFFFF"/>
+            </a:solidFill>
+          </a:ln>
+          <a:effectLst/>
+        </p:spPr>
+        <p:style>
+          <a:lnRef idx="2">
+            <a:schemeClr val="accent1"/>
+          </a:lnRef>
+          <a:fillRef idx="0">
+            <a:schemeClr val="accent1"/>
+          </a:fillRef>
+          <a:effectRef idx="1">
+            <a:schemeClr val="accent1"/>
+          </a:effectRef>
+          <a:fontRef idx="minor">
+            <a:schemeClr val="tx1"/>
+          </a:fontRef>
+        </p:style>
+      </p:cxnSp>
+      <p:sp>
+        <p:nvSpPr>
+          <p:cNvPr id="15" name="TextBox 14"/>
           <p:cNvSpPr txBox="1"/>
           <p:nvPr/>
         </p:nvSpPr>
@@ -7380,7 +8629,7 @@
       </p:sp>
       <p:sp>
         <p:nvSpPr>
-          <p:cNvPr id="13" name="TextBox 12"/>
+          <p:cNvPr id="16" name="TextBox 15"/>
           <p:cNvSpPr txBox="1"/>
           <p:nvPr/>
         </p:nvSpPr>
@@ -8035,9 +9284,693 @@
           </a:p>
         </p:txBody>
       </p:sp>
+      <p:sp>
+        <p:nvSpPr>
+          <p:cNvPr id="13" name="TextBox 12"/>
+          <p:cNvSpPr txBox="1"/>
+          <p:nvPr/>
+        </p:nvSpPr>
+        <p:spPr>
+          <a:xfrm>
+            <a:off x="8275320" y="1097280"/>
+            <a:ext cx="3337560" cy="457200"/>
+          </a:xfrm>
+          <a:prstGeom prst="rect">
+            <a:avLst/>
+          </a:prstGeom>
+          <a:noFill/>
+        </p:spPr>
+        <p:txBody>
+          <a:bodyPr wrap="square" anchor="t" lIns="0" rIns="0" tIns="0" bIns="0">
+            <a:spAutoFit/>
+          </a:bodyPr>
+          <a:lstStyle/>
+          <a:p>
+            <a:pPr algn="l">
+              <a:lnSpc>
+                <a:spcPct val="115000"/>
+              </a:lnSpc>
+              <a:spcBef>
+                <a:spcPts val="0"/>
+              </a:spcBef>
+              <a:spcAft>
+                <a:spcPts val="100"/>
+              </a:spcAft>
+            </a:pPr>
+            <a:r>
+              <a:rPr sz="1150" b="1">
+                <a:solidFill>
+                  <a:srgbClr val="FFFFFF"/>
+                </a:solidFill>
+                <a:latin typeface="DM Sans"/>
+              </a:rPr>
+              <a:t>Снижение внеплановых простоев,</a:t>
+            </a:r>
+          </a:p>
+          <a:p>
+            <a:pPr algn="l">
+              <a:lnSpc>
+                <a:spcPct val="115000"/>
+              </a:lnSpc>
+              <a:spcBef>
+                <a:spcPts val="0"/>
+              </a:spcBef>
+              <a:spcAft>
+                <a:spcPts val="0"/>
+              </a:spcAft>
+            </a:pPr>
+            <a:r>
+              <a:rPr sz="1150" b="1">
+                <a:solidFill>
+                  <a:srgbClr val="FFFFFF"/>
+                </a:solidFill>
+                <a:latin typeface="DM Sans"/>
+              </a:rPr>
+              <a:t>по направлениям внедрения</a:t>
+            </a:r>
+          </a:p>
+        </p:txBody>
+      </p:sp>
+      <p:cxnSp>
+        <p:nvCxnSpPr>
+          <p:cNvPr id="14" name="Connector 13"/>
+          <p:cNvCxnSpPr/>
+          <p:nvPr/>
+        </p:nvCxnSpPr>
+        <p:spPr>
+          <a:xfrm>
+            <a:off x="8275320" y="3136392"/>
+            <a:ext cx="3337560" cy="0"/>
+          </a:xfrm>
+          <a:prstGeom prst="line">
+            <a:avLst/>
+          </a:prstGeom>
+          <a:ln w="9525">
+            <a:solidFill>
+              <a:srgbClr val="8A8685"/>
+            </a:solidFill>
+          </a:ln>
+          <a:effectLst/>
+        </p:spPr>
+        <p:style>
+          <a:lnRef idx="2">
+            <a:schemeClr val="accent1"/>
+          </a:lnRef>
+          <a:fillRef idx="0">
+            <a:schemeClr val="accent1"/>
+          </a:fillRef>
+          <a:effectRef idx="1">
+            <a:schemeClr val="accent1"/>
+          </a:effectRef>
+          <a:fontRef idx="minor">
+            <a:schemeClr val="tx1"/>
+          </a:fontRef>
+        </p:style>
+      </p:cxnSp>
+      <p:sp>
+        <p:nvSpPr>
+          <p:cNvPr id="15" name="Rectangle 14"/>
+          <p:cNvSpPr/>
+          <p:nvPr/>
+        </p:nvSpPr>
+        <p:spPr>
+          <a:xfrm>
+            <a:off x="8483917" y="1947672"/>
+            <a:ext cx="417195" cy="1188720"/>
+          </a:xfrm>
+          <a:prstGeom prst="rect">
+            <a:avLst/>
+          </a:prstGeom>
+          <a:solidFill>
+            <a:srgbClr val="FFFFFF"/>
+          </a:solidFill>
+          <a:ln>
+            <a:noFill/>
+          </a:ln>
+          <a:effectLst/>
+        </p:spPr>
+        <p:style>
+          <a:lnRef idx="1">
+            <a:schemeClr val="accent1"/>
+          </a:lnRef>
+          <a:fillRef idx="3">
+            <a:schemeClr val="accent1"/>
+          </a:fillRef>
+          <a:effectRef idx="2">
+            <a:schemeClr val="accent1"/>
+          </a:effectRef>
+          <a:fontRef idx="minor">
+            <a:schemeClr val="lt1"/>
+          </a:fontRef>
+        </p:style>
+        <p:txBody>
+          <a:bodyPr rtlCol="0" anchor="ctr"/>
+          <a:lstStyle/>
+          <a:p>
+            <a:pPr algn="ctr"/>
+          </a:p>
+        </p:txBody>
+      </p:sp>
+      <p:sp>
+        <p:nvSpPr>
+          <p:cNvPr id="16" name="TextBox 15"/>
+          <p:cNvSpPr txBox="1"/>
+          <p:nvPr/>
+        </p:nvSpPr>
+        <p:spPr>
+          <a:xfrm>
+            <a:off x="8346757" y="1691640"/>
+            <a:ext cx="691515" cy="219456"/>
+          </a:xfrm>
+          <a:prstGeom prst="rect">
+            <a:avLst/>
+          </a:prstGeom>
+          <a:noFill/>
+        </p:spPr>
+        <p:txBody>
+          <a:bodyPr wrap="square" anchor="t" lIns="0" rIns="0" tIns="0" bIns="0">
+            <a:spAutoFit/>
+          </a:bodyPr>
+          <a:lstStyle/>
+          <a:p>
+            <a:pPr algn="ctr">
+              <a:lnSpc>
+                <a:spcPct val="100000"/>
+              </a:lnSpc>
+              <a:spcBef>
+                <a:spcPts val="0"/>
+              </a:spcBef>
+              <a:spcAft>
+                <a:spcPts val="0"/>
+              </a:spcAft>
+            </a:pPr>
+            <a:r>
+              <a:rPr sz="1100" b="1">
+                <a:solidFill>
+                  <a:srgbClr val="FFFFFF"/>
+                </a:solidFill>
+                <a:latin typeface="DM Sans"/>
+              </a:rPr>
+              <a:t>34%</a:t>
+            </a:r>
+          </a:p>
+        </p:txBody>
+      </p:sp>
+      <p:sp>
+        <p:nvSpPr>
+          <p:cNvPr id="17" name="TextBox 16"/>
+          <p:cNvSpPr txBox="1"/>
+          <p:nvPr/>
+        </p:nvSpPr>
+        <p:spPr>
+          <a:xfrm>
+            <a:off x="8275320" y="3182112"/>
+            <a:ext cx="834390" cy="274320"/>
+          </a:xfrm>
+          <a:prstGeom prst="rect">
+            <a:avLst/>
+          </a:prstGeom>
+          <a:noFill/>
+        </p:spPr>
+        <p:txBody>
+          <a:bodyPr wrap="square" anchor="t" lIns="0" rIns="0" tIns="0" bIns="0">
+            <a:spAutoFit/>
+          </a:bodyPr>
+          <a:lstStyle/>
+          <a:p>
+            <a:pPr algn="ctr">
+              <a:lnSpc>
+                <a:spcPct val="110000"/>
+              </a:lnSpc>
+              <a:spcBef>
+                <a:spcPts val="0"/>
+              </a:spcBef>
+              <a:spcAft>
+                <a:spcPts val="0"/>
+              </a:spcAft>
+            </a:pPr>
+            <a:r>
+              <a:rPr sz="800" b="1">
+                <a:solidFill>
+                  <a:srgbClr val="E8D8D6"/>
+                </a:solidFill>
+                <a:latin typeface="DM Sans"/>
+              </a:rPr>
+              <a:t>Добыча</a:t>
+            </a:r>
+          </a:p>
+        </p:txBody>
+      </p:sp>
+      <p:sp>
+        <p:nvSpPr>
+          <p:cNvPr id="18" name="Rectangle 17"/>
+          <p:cNvSpPr/>
+          <p:nvPr/>
+        </p:nvSpPr>
+        <p:spPr>
+          <a:xfrm>
+            <a:off x="9318307" y="2157447"/>
+            <a:ext cx="417195" cy="978945"/>
+          </a:xfrm>
+          <a:prstGeom prst="rect">
+            <a:avLst/>
+          </a:prstGeom>
+          <a:solidFill>
+            <a:srgbClr val="F3D6D3"/>
+          </a:solidFill>
+          <a:ln>
+            <a:noFill/>
+          </a:ln>
+          <a:effectLst/>
+        </p:spPr>
+        <p:style>
+          <a:lnRef idx="1">
+            <a:schemeClr val="accent1"/>
+          </a:lnRef>
+          <a:fillRef idx="3">
+            <a:schemeClr val="accent1"/>
+          </a:fillRef>
+          <a:effectRef idx="2">
+            <a:schemeClr val="accent1"/>
+          </a:effectRef>
+          <a:fontRef idx="minor">
+            <a:schemeClr val="lt1"/>
+          </a:fontRef>
+        </p:style>
+        <p:txBody>
+          <a:bodyPr rtlCol="0" anchor="ctr"/>
+          <a:lstStyle/>
+          <a:p>
+            <a:pPr algn="ctr"/>
+          </a:p>
+        </p:txBody>
+      </p:sp>
+      <p:sp>
+        <p:nvSpPr>
+          <p:cNvPr id="19" name="TextBox 18"/>
+          <p:cNvSpPr txBox="1"/>
+          <p:nvPr/>
+        </p:nvSpPr>
+        <p:spPr>
+          <a:xfrm>
+            <a:off x="9181147" y="1901415"/>
+            <a:ext cx="691515" cy="219456"/>
+          </a:xfrm>
+          <a:prstGeom prst="rect">
+            <a:avLst/>
+          </a:prstGeom>
+          <a:noFill/>
+        </p:spPr>
+        <p:txBody>
+          <a:bodyPr wrap="square" anchor="t" lIns="0" rIns="0" tIns="0" bIns="0">
+            <a:spAutoFit/>
+          </a:bodyPr>
+          <a:lstStyle/>
+          <a:p>
+            <a:pPr algn="ctr">
+              <a:lnSpc>
+                <a:spcPct val="100000"/>
+              </a:lnSpc>
+              <a:spcBef>
+                <a:spcPts val="0"/>
+              </a:spcBef>
+              <a:spcAft>
+                <a:spcPts val="0"/>
+              </a:spcAft>
+            </a:pPr>
+            <a:r>
+              <a:rPr sz="1100" b="1">
+                <a:solidFill>
+                  <a:srgbClr val="F3D6D3"/>
+                </a:solidFill>
+                <a:latin typeface="DM Sans"/>
+              </a:rPr>
+              <a:t>28%</a:t>
+            </a:r>
+          </a:p>
+        </p:txBody>
+      </p:sp>
+      <p:sp>
+        <p:nvSpPr>
+          <p:cNvPr id="20" name="TextBox 19"/>
+          <p:cNvSpPr txBox="1"/>
+          <p:nvPr/>
+        </p:nvSpPr>
+        <p:spPr>
+          <a:xfrm>
+            <a:off x="9109710" y="3182112"/>
+            <a:ext cx="834390" cy="274320"/>
+          </a:xfrm>
+          <a:prstGeom prst="rect">
+            <a:avLst/>
+          </a:prstGeom>
+          <a:noFill/>
+        </p:spPr>
+        <p:txBody>
+          <a:bodyPr wrap="square" anchor="t" lIns="0" rIns="0" tIns="0" bIns="0">
+            <a:spAutoFit/>
+          </a:bodyPr>
+          <a:lstStyle/>
+          <a:p>
+            <a:pPr algn="ctr">
+              <a:lnSpc>
+                <a:spcPct val="110000"/>
+              </a:lnSpc>
+              <a:spcBef>
+                <a:spcPts val="0"/>
+              </a:spcBef>
+              <a:spcAft>
+                <a:spcPts val="0"/>
+              </a:spcAft>
+            </a:pPr>
+            <a:r>
+              <a:rPr sz="800" b="1">
+                <a:solidFill>
+                  <a:srgbClr val="E8D8D6"/>
+                </a:solidFill>
+                <a:latin typeface="DM Sans"/>
+              </a:rPr>
+              <a:t>Металлургия</a:t>
+            </a:r>
+          </a:p>
+        </p:txBody>
+      </p:sp>
+      <p:sp>
+        <p:nvSpPr>
+          <p:cNvPr id="21" name="Rectangle 20"/>
+          <p:cNvSpPr/>
+          <p:nvPr/>
+        </p:nvSpPr>
+        <p:spPr>
+          <a:xfrm>
+            <a:off x="10152697" y="2367221"/>
+            <a:ext cx="417195" cy="769171"/>
+          </a:xfrm>
+          <a:prstGeom prst="rect">
+            <a:avLst/>
+          </a:prstGeom>
+          <a:solidFill>
+            <a:srgbClr val="F3D6D3"/>
+          </a:solidFill>
+          <a:ln>
+            <a:noFill/>
+          </a:ln>
+          <a:effectLst/>
+        </p:spPr>
+        <p:style>
+          <a:lnRef idx="1">
+            <a:schemeClr val="accent1"/>
+          </a:lnRef>
+          <a:fillRef idx="3">
+            <a:schemeClr val="accent1"/>
+          </a:fillRef>
+          <a:effectRef idx="2">
+            <a:schemeClr val="accent1"/>
+          </a:effectRef>
+          <a:fontRef idx="minor">
+            <a:schemeClr val="lt1"/>
+          </a:fontRef>
+        </p:style>
+        <p:txBody>
+          <a:bodyPr rtlCol="0" anchor="ctr"/>
+          <a:lstStyle/>
+          <a:p>
+            <a:pPr algn="ctr"/>
+          </a:p>
+        </p:txBody>
+      </p:sp>
+      <p:sp>
+        <p:nvSpPr>
+          <p:cNvPr id="22" name="TextBox 21"/>
+          <p:cNvSpPr txBox="1"/>
+          <p:nvPr/>
+        </p:nvSpPr>
+        <p:spPr>
+          <a:xfrm>
+            <a:off x="10015537" y="2111189"/>
+            <a:ext cx="691515" cy="219456"/>
+          </a:xfrm>
+          <a:prstGeom prst="rect">
+            <a:avLst/>
+          </a:prstGeom>
+          <a:noFill/>
+        </p:spPr>
+        <p:txBody>
+          <a:bodyPr wrap="square" anchor="t" lIns="0" rIns="0" tIns="0" bIns="0">
+            <a:spAutoFit/>
+          </a:bodyPr>
+          <a:lstStyle/>
+          <a:p>
+            <a:pPr algn="ctr">
+              <a:lnSpc>
+                <a:spcPct val="100000"/>
+              </a:lnSpc>
+              <a:spcBef>
+                <a:spcPts val="0"/>
+              </a:spcBef>
+              <a:spcAft>
+                <a:spcPts val="0"/>
+              </a:spcAft>
+            </a:pPr>
+            <a:r>
+              <a:rPr sz="1100" b="1">
+                <a:solidFill>
+                  <a:srgbClr val="F3D6D3"/>
+                </a:solidFill>
+                <a:latin typeface="DM Sans"/>
+              </a:rPr>
+              <a:t>22%</a:t>
+            </a:r>
+          </a:p>
+        </p:txBody>
+      </p:sp>
+      <p:sp>
+        <p:nvSpPr>
+          <p:cNvPr id="23" name="TextBox 22"/>
+          <p:cNvSpPr txBox="1"/>
+          <p:nvPr/>
+        </p:nvSpPr>
+        <p:spPr>
+          <a:xfrm>
+            <a:off x="9944100" y="3182112"/>
+            <a:ext cx="834390" cy="274320"/>
+          </a:xfrm>
+          <a:prstGeom prst="rect">
+            <a:avLst/>
+          </a:prstGeom>
+          <a:noFill/>
+        </p:spPr>
+        <p:txBody>
+          <a:bodyPr wrap="square" anchor="t" lIns="0" rIns="0" tIns="0" bIns="0">
+            <a:spAutoFit/>
+          </a:bodyPr>
+          <a:lstStyle/>
+          <a:p>
+            <a:pPr algn="ctr">
+              <a:lnSpc>
+                <a:spcPct val="110000"/>
+              </a:lnSpc>
+              <a:spcBef>
+                <a:spcPts val="0"/>
+              </a:spcBef>
+              <a:spcAft>
+                <a:spcPts val="0"/>
+              </a:spcAft>
+            </a:pPr>
+            <a:r>
+              <a:rPr sz="800" b="1">
+                <a:solidFill>
+                  <a:srgbClr val="E8D8D6"/>
+                </a:solidFill>
+                <a:latin typeface="DM Sans"/>
+              </a:rPr>
+              <a:t>Энергетика</a:t>
+            </a:r>
+          </a:p>
+        </p:txBody>
+      </p:sp>
+      <p:sp>
+        <p:nvSpPr>
+          <p:cNvPr id="24" name="Rectangle 23"/>
+          <p:cNvSpPr/>
+          <p:nvPr/>
+        </p:nvSpPr>
+        <p:spPr>
+          <a:xfrm>
+            <a:off x="10987087" y="2472108"/>
+            <a:ext cx="417195" cy="664284"/>
+          </a:xfrm>
+          <a:prstGeom prst="rect">
+            <a:avLst/>
+          </a:prstGeom>
+          <a:solidFill>
+            <a:srgbClr val="F3D6D3"/>
+          </a:solidFill>
+          <a:ln>
+            <a:noFill/>
+          </a:ln>
+          <a:effectLst/>
+        </p:spPr>
+        <p:style>
+          <a:lnRef idx="1">
+            <a:schemeClr val="accent1"/>
+          </a:lnRef>
+          <a:fillRef idx="3">
+            <a:schemeClr val="accent1"/>
+          </a:fillRef>
+          <a:effectRef idx="2">
+            <a:schemeClr val="accent1"/>
+          </a:effectRef>
+          <a:fontRef idx="minor">
+            <a:schemeClr val="lt1"/>
+          </a:fontRef>
+        </p:style>
+        <p:txBody>
+          <a:bodyPr rtlCol="0" anchor="ctr"/>
+          <a:lstStyle/>
+          <a:p>
+            <a:pPr algn="ctr"/>
+          </a:p>
+        </p:txBody>
+      </p:sp>
+      <p:sp>
+        <p:nvSpPr>
+          <p:cNvPr id="25" name="TextBox 24"/>
+          <p:cNvSpPr txBox="1"/>
+          <p:nvPr/>
+        </p:nvSpPr>
+        <p:spPr>
+          <a:xfrm>
+            <a:off x="10849927" y="2216076"/>
+            <a:ext cx="691515" cy="219456"/>
+          </a:xfrm>
+          <a:prstGeom prst="rect">
+            <a:avLst/>
+          </a:prstGeom>
+          <a:noFill/>
+        </p:spPr>
+        <p:txBody>
+          <a:bodyPr wrap="square" anchor="t" lIns="0" rIns="0" tIns="0" bIns="0">
+            <a:spAutoFit/>
+          </a:bodyPr>
+          <a:lstStyle/>
+          <a:p>
+            <a:pPr algn="ctr">
+              <a:lnSpc>
+                <a:spcPct val="100000"/>
+              </a:lnSpc>
+              <a:spcBef>
+                <a:spcPts val="0"/>
+              </a:spcBef>
+              <a:spcAft>
+                <a:spcPts val="0"/>
+              </a:spcAft>
+            </a:pPr>
+            <a:r>
+              <a:rPr sz="1100" b="1">
+                <a:solidFill>
+                  <a:srgbClr val="F3D6D3"/>
+                </a:solidFill>
+                <a:latin typeface="DM Sans"/>
+              </a:rPr>
+              <a:t>19%</a:t>
+            </a:r>
+          </a:p>
+        </p:txBody>
+      </p:sp>
+      <p:sp>
+        <p:nvSpPr>
+          <p:cNvPr id="26" name="TextBox 25"/>
+          <p:cNvSpPr txBox="1"/>
+          <p:nvPr/>
+        </p:nvSpPr>
+        <p:spPr>
+          <a:xfrm>
+            <a:off x="10778490" y="3182112"/>
+            <a:ext cx="834390" cy="274320"/>
+          </a:xfrm>
+          <a:prstGeom prst="rect">
+            <a:avLst/>
+          </a:prstGeom>
+          <a:noFill/>
+        </p:spPr>
+        <p:txBody>
+          <a:bodyPr wrap="square" anchor="t" lIns="0" rIns="0" tIns="0" bIns="0">
+            <a:spAutoFit/>
+          </a:bodyPr>
+          <a:lstStyle/>
+          <a:p>
+            <a:pPr algn="ctr">
+              <a:lnSpc>
+                <a:spcPct val="110000"/>
+              </a:lnSpc>
+              <a:spcBef>
+                <a:spcPts val="0"/>
+              </a:spcBef>
+              <a:spcAft>
+                <a:spcPts val="0"/>
+              </a:spcAft>
+            </a:pPr>
+            <a:r>
+              <a:rPr sz="800" b="1">
+                <a:solidFill>
+                  <a:srgbClr val="E8D8D6"/>
+                </a:solidFill>
+                <a:latin typeface="DM Sans"/>
+              </a:rPr>
+              <a:t>Цемент</a:t>
+            </a:r>
+          </a:p>
+        </p:txBody>
+      </p:sp>
+      <p:sp>
+        <p:nvSpPr>
+          <p:cNvPr id="27" name="TextBox 26"/>
+          <p:cNvSpPr txBox="1"/>
+          <p:nvPr/>
+        </p:nvSpPr>
+        <p:spPr>
+          <a:xfrm>
+            <a:off x="8275320" y="3611880"/>
+            <a:ext cx="3337560" cy="548640"/>
+          </a:xfrm>
+          <a:prstGeom prst="rect">
+            <a:avLst/>
+          </a:prstGeom>
+          <a:noFill/>
+        </p:spPr>
+        <p:txBody>
+          <a:bodyPr wrap="square" anchor="t" lIns="0" rIns="0" tIns="0" bIns="0">
+            <a:spAutoFit/>
+          </a:bodyPr>
+          <a:lstStyle/>
+          <a:p>
+            <a:pPr algn="l">
+              <a:lnSpc>
+                <a:spcPct val="130000"/>
+              </a:lnSpc>
+              <a:spcBef>
+                <a:spcPts val="0"/>
+              </a:spcBef>
+              <a:spcAft>
+                <a:spcPts val="0"/>
+              </a:spcAft>
+            </a:pPr>
+            <a:r>
+              <a:rPr sz="900" b="0">
+                <a:solidFill>
+                  <a:srgbClr val="C9AEAC"/>
+                </a:solidFill>
+                <a:latin typeface="DM Sans"/>
+              </a:rPr>
+              <a:t>Иллюстративные данные — приводятся как референс и уточняются по факту внедрения.</a:t>
+            </a:r>
+          </a:p>
+        </p:txBody>
+      </p:sp>
       <p:pic>
         <p:nvPicPr>
-          <p:cNvPr id="13" name="Picture 12" descr="algoritm-logo-white.png"/>
+          <p:cNvPr id="28" name="Picture 27" descr="algoritm-logo-white.png"/>
           <p:cNvPicPr>
             <a:picLocks noChangeAspect="1"/>
           </p:cNvPicPr>
